--- a/deliverables/vcm_presentation/VCM_7页精简汇报_可编辑版.pptx
+++ b/deliverables/vcm_presentation/VCM_7页精简汇报_可编辑版.pptx
@@ -13276,7 +13276,7 @@
                 </a:solidFill>
                 <a:latin typeface="Microsoft YaHei"/>
               </a:rPr>
-              <a:t>Forward–Backward turns unknown positions into a learnable alignment problem</a:t>
+              <a:t>Forward–Backward learns variable-length alignments</a:t>
             </a:r>
           </a:p>
         </p:txBody>
